--- a/apl/APL_Presentacion_26_27.pptx
+++ b/apl/APL_Presentacion_26_27.pptx
@@ -13910,7 +13910,55 @@
                 <a:cs typeface="Lato"/>
                 <a:sym typeface="Lato"/>
               </a:rPr>
-              <a:t>La superación del 15% de faltas de asistencia (13 horas lectivas) conlleva la pérdida del derecho a la evaluación continua en el centro educativo.</a:t>
+              <a:t>La superación del </a:t>
+            </a:r>
+            <a:r>
+              <a:rPr lang="en-US" sz="1250">
+                <a:solidFill>
+                  <a:srgbClr val="475569"/>
+                </a:solidFill>
+                <a:latin typeface="Lato"/>
+                <a:ea typeface="Lato"/>
+                <a:cs typeface="Lato"/>
+                <a:sym typeface="Lato"/>
+              </a:rPr>
+              <a:t>20</a:t>
+            </a:r>
+            <a:r>
+              <a:rPr b="0" i="0" lang="en-US" sz="1250" u="none" cap="none" strike="noStrike">
+                <a:solidFill>
+                  <a:srgbClr val="475569"/>
+                </a:solidFill>
+                <a:latin typeface="Lato"/>
+                <a:ea typeface="Lato"/>
+                <a:cs typeface="Lato"/>
+                <a:sym typeface="Lato"/>
+              </a:rPr>
+              <a:t>% de faltas de asistencia (1</a:t>
+            </a:r>
+            <a:r>
+              <a:rPr lang="en-US" sz="1250">
+                <a:solidFill>
+                  <a:srgbClr val="475569"/>
+                </a:solidFill>
+                <a:latin typeface="Lato"/>
+                <a:ea typeface="Lato"/>
+                <a:cs typeface="Lato"/>
+                <a:sym typeface="Lato"/>
+              </a:rPr>
+              <a:t>7</a:t>
+            </a:r>
+            <a:r>
+              <a:rPr b="0" i="0" lang="en-US" sz="1250" u="none" cap="none" strike="noStrike">
+                <a:solidFill>
+                  <a:srgbClr val="475569"/>
+                </a:solidFill>
+                <a:latin typeface="Lato"/>
+                <a:ea typeface="Lato"/>
+                <a:cs typeface="Lato"/>
+                <a:sym typeface="Lato"/>
+              </a:rPr>
+              <a:t> horas lectivas) conlleva la pérdida del derecho a la evaluación continua en el centro educativo.</a:t>
             </a:r>
             <a:endParaRPr sz="1600"/>
           </a:p>
@@ -14064,7 +14112,7 @@
                 <a:cs typeface="Lato"/>
                 <a:sym typeface="Lato"/>
               </a:rPr>
-              <a:t>ón</a:t>
+              <a:t>ón </a:t>
             </a:r>
             <a:r>
               <a:rPr b="0" i="0" lang="en-US" sz="1250" u="none" cap="none" strike="noStrike">
@@ -17599,8 +17647,8 @@
         </p:nvSpPr>
         <p:spPr>
           <a:xfrm>
-            <a:off x="8327975" y="3086992"/>
-            <a:ext cx="3092350" cy="762000"/>
+            <a:off x="8201675" y="3087000"/>
+            <a:ext cx="3296400" cy="908100"/>
           </a:xfrm>
           <a:prstGeom prst="rect">
             <a:avLst/>
@@ -17629,7 +17677,7 @@
               <a:buNone/>
             </a:pPr>
             <a:r>
-              <a:rPr b="1" i="0" lang="en-US" sz="6000" u="none" cap="none" strike="noStrike">
+              <a:rPr b="1" i="0" lang="en-US" sz="5900" u="none" cap="none" strike="noStrike">
                 <a:solidFill>
                   <a:srgbClr val="2563EB"/>
                 </a:solidFill>
@@ -17638,9 +17686,21 @@
                 <a:cs typeface="Poppins"/>
                 <a:sym typeface="Poppins"/>
               </a:rPr>
-              <a:t>400</a:t>
+              <a:t>40</a:t>
             </a:r>
-            <a:endParaRPr/>
+            <a:r>
+              <a:rPr b="1" lang="en-US" sz="5900">
+                <a:solidFill>
+                  <a:srgbClr val="2563EB"/>
+                </a:solidFill>
+                <a:latin typeface="Poppins"/>
+                <a:ea typeface="Poppins"/>
+                <a:cs typeface="Poppins"/>
+                <a:sym typeface="Poppins"/>
+              </a:rPr>
+              <a:t>2/538</a:t>
+            </a:r>
+            <a:endParaRPr sz="1300"/>
           </a:p>
         </p:txBody>
       </p:sp>
@@ -18047,7 +18107,7 @@
             <a:tbl>
               <a:tblPr>
                 <a:noFill/>
-                <a:tableStyleId>{F540FB96-60D6-4CA2-A78B-2B2872020552}</a:tableStyleId>
+                <a:tableStyleId>{ED619DE4-48C2-42D2-8DEE-6CD80CDE45EE}</a:tableStyleId>
               </a:tblPr>
               <a:tblGrid>
                 <a:gridCol w="3683000"/>
@@ -19813,7 +19873,7 @@
                   <a:cs typeface="Lato"/>
                   <a:sym typeface="Lato"/>
                 </a:rPr>
-                <a:t>24</a:t>
+                <a:t>20</a:t>
               </a:r>
               <a:r>
                 <a:rPr lang="en-US" sz="1350">
@@ -19883,7 +19943,7 @@
                   <a:cs typeface="Lato"/>
                   <a:sym typeface="Lato"/>
                 </a:rPr>
-                <a:t>15 Sep - 23 Oct</a:t>
+                <a:t>15 Sep - 15 Oct</a:t>
               </a:r>
               <a:endParaRPr sz="1350">
                 <a:solidFill>
@@ -20069,7 +20129,7 @@
                   <a:cs typeface="Lato"/>
                   <a:sym typeface="Lato"/>
                 </a:rPr>
-                <a:t>20</a:t>
+                <a:t>18</a:t>
               </a:r>
               <a:r>
                 <a:rPr lang="en-US" sz="1350">
@@ -20139,7 +20199,7 @@
                   <a:cs typeface="Lato"/>
                   <a:sym typeface="Lato"/>
                 </a:rPr>
-                <a:t>26</a:t>
+                <a:t>16</a:t>
               </a:r>
               <a:r>
                 <a:rPr lang="en-US" sz="1350">
@@ -20151,7 +20211,7 @@
                   <a:cs typeface="Lato"/>
                   <a:sym typeface="Lato"/>
                 </a:rPr>
-                <a:t> Oct - 1 Dic</a:t>
+                <a:t> Oct - 15 Nov</a:t>
               </a:r>
               <a:endParaRPr sz="1350">
                 <a:solidFill>
@@ -20372,7 +20432,7 @@
                   <a:cs typeface="Lato"/>
                   <a:sym typeface="Lato"/>
                 </a:rPr>
-                <a:t>20</a:t>
+                <a:t>18</a:t>
               </a:r>
               <a:r>
                 <a:rPr lang="en-US" sz="1350">
@@ -20442,7 +20502,7 @@
                   <a:cs typeface="Lato"/>
                   <a:sym typeface="Lato"/>
                 </a:rPr>
-                <a:t>2</a:t>
+                <a:t>16</a:t>
               </a:r>
               <a:r>
                 <a:rPr lang="en-US" sz="1350">
@@ -20454,7 +20514,7 @@
                   <a:cs typeface="Lato"/>
                   <a:sym typeface="Lato"/>
                 </a:rPr>
-                <a:t> Dic - 29 Ene</a:t>
+                <a:t> Nov - 22 Dic</a:t>
               </a:r>
               <a:endParaRPr sz="1350">
                 <a:solidFill>
@@ -20652,7 +20712,7 @@
                   <a:cs typeface="Lato"/>
                   <a:sym typeface="Lato"/>
                 </a:rPr>
-                <a:t>10</a:t>
+                <a:t>8</a:t>
               </a:r>
               <a:r>
                 <a:rPr lang="en-US" sz="1350">
@@ -20722,7 +20782,7 @@
                   <a:cs typeface="Lato"/>
                   <a:sym typeface="Lato"/>
                 </a:rPr>
-                <a:t>01 Feb - 19 Feb</a:t>
+                <a:t>07 Ene - 31 Ene</a:t>
               </a:r>
               <a:endParaRPr sz="1350">
                 <a:solidFill>
@@ -20978,7 +21038,7 @@
                   <a:cs typeface="Lato"/>
                   <a:sym typeface="Lato"/>
                 </a:rPr>
-                <a:t>22</a:t>
+                <a:t>1</a:t>
               </a:r>
               <a:r>
                 <a:rPr lang="en-US" sz="1350">
@@ -20990,7 +21050,7 @@
                   <a:cs typeface="Lato"/>
                   <a:sym typeface="Lato"/>
                 </a:rPr>
-                <a:t> Feb - 03 Mar</a:t>
+                <a:t> Feb - 15 Mar</a:t>
               </a:r>
               <a:endParaRPr sz="1350">
                 <a:solidFill>
@@ -21246,7 +21306,7 @@
                   <a:cs typeface="Lato"/>
                   <a:sym typeface="Lato"/>
                 </a:rPr>
-                <a:t>04</a:t>
+                <a:t>16</a:t>
               </a:r>
               <a:r>
                 <a:rPr lang="en-US" sz="1350">
@@ -21258,7 +21318,7 @@
                   <a:cs typeface="Lato"/>
                   <a:sym typeface="Lato"/>
                 </a:rPr>
-                <a:t> Mar - 12 Mar</a:t>
+                <a:t> Feb - 28 Feb</a:t>
               </a:r>
               <a:endParaRPr sz="1350">
                 <a:solidFill>
